--- a/market_prediction_strategy.pptx
+++ b/market_prediction_strategy.pptx
@@ -1638,18 +1638,7 @@
                 <a:ea typeface="Calibri" pitchFamily="34" charset="-122"/>
                 <a:cs typeface="Calibri" pitchFamily="34" charset="-120"/>
               </a:rPr>
-              <a:t>Volatility Constrained · Ridge </a:t>
-            </a:r>
-            <a:r>
-              <a:rPr lang="en-US" sz="1800" dirty="0" smtClean="0">
-                <a:solidFill>
-                  <a:srgbClr val="CADCFC"/>
-                </a:solidFill>
-                <a:latin typeface="Calibri" pitchFamily="34" charset="0"/>
-                <a:ea typeface="Calibri" pitchFamily="34" charset="-122"/>
-                <a:cs typeface="Calibri" pitchFamily="34" charset="-120"/>
-              </a:rPr>
-              <a:t>Regression</a:t>
+              <a:t>Volatility Constrained · Ridge Regression</a:t>
             </a:r>
             <a:endParaRPr lang="en-US" sz="1800" dirty="0"/>
           </a:p>
@@ -5856,6 +5845,13 @@
             </a:outerShdw>
           </a:effectLst>
         </p:spPr>
+        <p:txBody>
+          <a:bodyPr/>
+          <a:lstStyle/>
+          <a:p>
+            <a:endParaRPr lang="en-LB" dirty="0"/>
+          </a:p>
+        </p:txBody>
       </p:sp>
       <p:pic>
         <p:nvPicPr>
@@ -7323,6 +7319,13 @@
             </a:outerShdw>
           </a:effectLst>
         </p:spPr>
+        <p:txBody>
+          <a:bodyPr/>
+          <a:lstStyle/>
+          <a:p>
+            <a:endParaRPr lang="en-LB" dirty="0"/>
+          </a:p>
+        </p:txBody>
       </p:sp>
       <p:sp>
         <p:nvSpPr>
@@ -8440,7 +8443,7 @@
           <p:nvPr>
             <p:extLst>
               <p:ext uri="{D42A27DB-BD31-4B8C-83A1-F6EECF244321}">
-                <p14:modId xmlns:p14="http://schemas.microsoft.com/office/powerpoint/2010/main" val="1579011935"/>
+                <p14:modId xmlns:p14="http://schemas.microsoft.com/office/powerpoint/2010/main" val="439181792"/>
               </p:ext>
             </p:extLst>
           </p:nvPr>
@@ -9337,7 +9340,7 @@
                         <a:buNone/>
                       </a:pPr>
                       <a:r>
-                        <a:rPr lang="en-US" sz="1300" dirty="0">
+                        <a:rPr lang="en-US" sz="1300">
                           <a:solidFill>
                             <a:srgbClr val="1E293B"/>
                           </a:solidFill>
@@ -9345,7 +9348,7 @@
                           <a:ea typeface="Calibri" pitchFamily="34" charset="-122"/>
                           <a:cs typeface="Calibri" pitchFamily="34" charset="-120"/>
                         </a:rPr>
-                        <a:t>LightGBM (Phase 0)</a:t>
+                        <a:t>LightGBM</a:t>
                       </a:r>
                       <a:endParaRPr lang="en-US" sz="1300" dirty="0">
                         <a:latin typeface="Calibri" charset="0"/>
@@ -12676,7 +12679,7 @@
               <a:buNone/>
             </a:pPr>
             <a:r>
-              <a:rPr lang="en-US" sz="1150" b="1" dirty="0" smtClean="0">
+              <a:rPr lang="en-US" sz="1150" b="1" dirty="0">
                 <a:solidFill>
                   <a:srgbClr val="028090"/>
                 </a:solidFill>
@@ -12684,18 +12687,7 @@
                 <a:ea typeface="Calibri" pitchFamily="34" charset="-122"/>
                 <a:cs typeface="Calibri" pitchFamily="34" charset="-120"/>
               </a:rPr>
-              <a:t>Ridge </a:t>
-            </a:r>
-            <a:r>
-              <a:rPr lang="en-US" sz="1150" b="1" dirty="0">
-                <a:solidFill>
-                  <a:srgbClr val="028090"/>
-                </a:solidFill>
-                <a:latin typeface="Calibri" pitchFamily="34" charset="0"/>
-                <a:ea typeface="Calibri" pitchFamily="34" charset="-122"/>
-                <a:cs typeface="Calibri" pitchFamily="34" charset="-120"/>
-              </a:rPr>
-              <a:t>delivers Sharpe 2.394, return 41.62%, alpha +25.48% — far exceeding the 2.16 target score</a:t>
+              <a:t>Ridge delivers Sharpe 2.394, return 41.62%, alpha +25.48% — far exceeding the 2.16 target score</a:t>
             </a:r>
             <a:endParaRPr lang="en-US" sz="1150" dirty="0"/>
           </a:p>
@@ -15100,7 +15092,7 @@
               <a:buNone/>
             </a:pPr>
             <a:r>
-              <a:rPr lang="en-US" sz="1500" i="1" dirty="0" smtClean="0">
+              <a:rPr lang="en-US" sz="1500" i="1" dirty="0">
                 <a:solidFill>
                   <a:srgbClr val="CADCFC"/>
                 </a:solidFill>
@@ -15108,18 +15100,7 @@
                 <a:ea typeface="Calibri" pitchFamily="34" charset="-122"/>
                 <a:cs typeface="Calibri" pitchFamily="34" charset="-120"/>
               </a:rPr>
-              <a:t>Ridge </a:t>
-            </a:r>
-            <a:r>
-              <a:rPr lang="en-US" sz="1500" i="1" dirty="0">
-                <a:solidFill>
-                  <a:srgbClr val="CADCFC"/>
-                </a:solidFill>
-                <a:latin typeface="Calibri" pitchFamily="34" charset="0"/>
-                <a:ea typeface="Calibri" pitchFamily="34" charset="-122"/>
-                <a:cs typeface="Calibri" pitchFamily="34" charset="-120"/>
-              </a:rPr>
-              <a:t>α=100 · Top-30 Features</a:t>
+              <a:t>Ridge α=100 · Top-30 Features</a:t>
             </a:r>
             <a:endParaRPr lang="en-US" sz="1500" dirty="0"/>
           </a:p>
